--- a/classes/parte-6-analisis-de-malware/149-comunicaciones-de-comando-y-control-c2-del-malware/clase-149-presentacion.pptx
+++ b/classes/parte-6-analisis-de-malware/149-comunicaciones-de-comando-y-control-c2-del-malware/clase-149-presentacion.pptx
@@ -17,6 +17,9 @@
     <p:sldId id="265" r:id="rId16"/>
     <p:sldId id="266" r:id="rId17"/>
     <p:sldId id="267" r:id="rId18"/>
+    <p:sldId id="268" r:id="rId19"/>
+    <p:sldId id="269" r:id="rId20"/>
+    <p:sldId id="270" r:id="rId21"/>
   </p:sldIdLst>
   <p:sldSz cx="9144000" cy="6858000" type="screen4x3"/>
   <p:notesSz cx="6858000" cy="9144000"/>
@@ -3198,7 +3201,7 @@
                   <a:srgbClr val="0B3D2E"/>
                 </a:solidFill>
               </a:rPr>
-              <a:t>⚠️ Errores comunes</a:t>
+              <a:t>✍️ Ejercicios</a:t>
             </a:r>
           </a:p>
         </p:txBody>
@@ -3236,67 +3239,82 @@
                   <a:srgbClr val="22282E"/>
                 </a:solidFill>
               </a:rPr>
-              <a:t>•  No hay tráfico C2 — Sin servicios simulados o detección de sandbox; usa INetSim y enmascara VM</a:t>
-            </a:r>
-          </a:p>
-          <a:p>
-            <a:pPr>
-              <a:spcAft>
-                <a:spcPts val="600"/>
-              </a:spcAft>
-            </a:pPr>
-            <a:r>
-              <a:rPr sz="1500">
-                <a:solidFill>
-                  <a:srgbClr val="22282E"/>
-                </a:solidFill>
-              </a:rPr>
-              <a:t>•  No puedo descifrar el beacon — Cifrado fuerte; extrae la clave del binario/memoria</a:t>
-            </a:r>
-          </a:p>
-          <a:p>
-            <a:pPr>
-              <a:spcAft>
-                <a:spcPts val="600"/>
-              </a:spcAft>
-            </a:pPr>
-            <a:r>
-              <a:rPr sz="1500">
-                <a:solidFill>
-                  <a:srgbClr val="22282E"/>
-                </a:solidFill>
-              </a:rPr>
-              <a:t>•  Beacon irregular — Jitter alto; promedia varios intervalos</a:t>
-            </a:r>
-          </a:p>
-          <a:p>
-            <a:pPr>
-              <a:spcAft>
-                <a:spcPts val="600"/>
-              </a:spcAft>
-            </a:pPr>
-            <a:r>
-              <a:rPr sz="1500">
-                <a:solidFill>
-                  <a:srgbClr val="22282E"/>
-                </a:solidFill>
-              </a:rPr>
-              <a:t>•  Dominios cambian cada ejecución — DGA; identifica y reproduce el algoritmo</a:t>
-            </a:r>
-          </a:p>
-          <a:p>
-            <a:pPr>
-              <a:spcAft>
-                <a:spcPts val="600"/>
-              </a:spcAft>
-            </a:pPr>
-            <a:r>
-              <a:rPr sz="1500">
-                <a:solidFill>
-                  <a:srgbClr val="22282E"/>
-                </a:solidFill>
-              </a:rPr>
-              <a:t>•  Firma con muchos falsos positivos — Basaste en algo genérico; usa URI+UA+patrón combinados</a:t>
+              <a:t>•  Diferencia beacon HTTP, DNS y TCP crudo por sus ventajas de evasión.</a:t>
+            </a:r>
+          </a:p>
+          <a:p>
+            <a:pPr>
+              <a:spcAft>
+                <a:spcPts val="600"/>
+              </a:spcAft>
+            </a:pPr>
+            <a:r>
+              <a:rPr sz="1500">
+                <a:solidFill>
+                  <a:srgbClr val="22282E"/>
+                </a:solidFill>
+              </a:rPr>
+              <a:t>•  Explica cómo un DGA complica el bloqueo y cómo se puede predecir.</a:t>
+            </a:r>
+          </a:p>
+          <a:p>
+            <a:pPr>
+              <a:spcAft>
+                <a:spcPts val="600"/>
+              </a:spcAft>
+            </a:pPr>
+            <a:r>
+              <a:rPr sz="1500">
+                <a:solidFill>
+                  <a:srgbClr val="22282E"/>
+                </a:solidFill>
+              </a:rPr>
+              <a:t>•  Decodifica un payload C2 simple con CyberChef y describe el comando.</a:t>
+            </a:r>
+          </a:p>
+          <a:p>
+            <a:pPr>
+              <a:spcAft>
+                <a:spcPts val="600"/>
+              </a:spcAft>
+            </a:pPr>
+            <a:r>
+              <a:rPr sz="1500">
+                <a:solidFill>
+                  <a:srgbClr val="22282E"/>
+                </a:solidFill>
+              </a:rPr>
+              <a:t>•  Reconoce un perfil malleable y qué imita.</a:t>
+            </a:r>
+          </a:p>
+          <a:p>
+            <a:pPr>
+              <a:spcAft>
+                <a:spcPts val="600"/>
+              </a:spcAft>
+            </a:pPr>
+            <a:r>
+              <a:rPr sz="1500">
+                <a:solidFill>
+                  <a:srgbClr val="22282E"/>
+                </a:solidFill>
+              </a:rPr>
+              <a:t>•  Escribe una firma Suricata para un user-agent o URI característico.</a:t>
+            </a:r>
+          </a:p>
+          <a:p>
+            <a:pPr>
+              <a:spcAft>
+                <a:spcPts val="600"/>
+              </a:spcAft>
+            </a:pPr>
+            <a:r>
+              <a:rPr sz="1500">
+                <a:solidFill>
+                  <a:srgbClr val="22282E"/>
+                </a:solidFill>
+              </a:rPr>
+              <a:t>•  Extrae la config de C2 de una muestra y preséntala en tabla.</a:t>
             </a:r>
           </a:p>
         </p:txBody>
@@ -3347,7 +3365,7 @@
                   <a:srgbClr val="0B3D2E"/>
                 </a:solidFill>
               </a:rPr>
-              <a:t>❓ Preguntas frecuentes</a:t>
+              <a:t>📝 Reto verificable</a:t>
             </a:r>
           </a:p>
         </p:txBody>
@@ -3385,37 +3403,22 @@
                   <a:srgbClr val="22282E"/>
                 </a:solidFill>
               </a:rPr>
-              <a:t>•  ❓ ¿Cómo detecto C2 cifrado con HTTPS? Con metadatos: JA3/JA3S, SNI, tamaño y periodicidad de flujos, y reputación del destino, sin necesidad de descifrar.</a:t>
-            </a:r>
-          </a:p>
-          <a:p>
-            <a:pPr>
-              <a:spcAft>
-                <a:spcPts val="600"/>
-              </a:spcAft>
-            </a:pPr>
-            <a:r>
-              <a:rPr sz="1500">
-                <a:solidFill>
-                  <a:srgbClr val="22282E"/>
-                </a:solidFill>
-              </a:rPr>
-              <a:t>•  ❓ ¿Qué es un perfil malleable? Una plantilla (Cobalt Strike) que define cómo luce el tráfico para imitar servicios legítimos y evadir firmas.</a:t>
-            </a:r>
-          </a:p>
-          <a:p>
-            <a:pPr>
-              <a:spcAft>
-                <a:spcPts val="600"/>
-              </a:spcAft>
-            </a:pPr>
-            <a:r>
-              <a:rPr sz="1500">
-                <a:solidFill>
-                  <a:srgbClr val="22282E"/>
-                </a:solidFill>
-              </a:rPr>
-              <a:t>•  ❓ ¿Puedo interactuar con el C2 real? No sin autorización. Analiza con servidor simulado; contactar infraestructura del atacante puede alertarle o ser ilegal.</a:t>
+              <a:t>•  Entrega un informe de C2 de una muestra con: mecanismo de resolución, protocolo y patrón de beacon, config extraída (dominios/puertos/clave/intervalo), muestra de tráfico decodificado y una firma de…</a:t>
+            </a:r>
+          </a:p>
+          <a:p>
+            <a:pPr>
+              <a:spcAft>
+                <a:spcPts val="600"/>
+              </a:spcAft>
+            </a:pPr>
+            <a:r>
+              <a:rPr sz="1500">
+                <a:solidFill>
+                  <a:srgbClr val="22282E"/>
+                </a:solidFill>
+              </a:rPr>
+              <a:t>•  Criterio de aceptación: la firma propuesta dispara sobre el tráfico capturado en el lab y la config incluye al menos un dominio/IP y el intervalo de beacon verificados.</a:t>
             </a:r>
           </a:p>
         </p:txBody>
@@ -3466,7 +3469,7 @@
                   <a:srgbClr val="0B3D2E"/>
                 </a:solidFill>
               </a:rPr>
-              <a:t>🔗 Referencias</a:t>
+              <a:t>⚠️ Errores comunes</a:t>
             </a:r>
           </a:p>
         </p:txBody>
@@ -3504,6 +3507,274 @@
                   <a:srgbClr val="22282E"/>
                 </a:solidFill>
               </a:rPr>
+              <a:t>•  No hay tráfico C2 — Sin servicios simulados o detección de sandbox; usa INetSim y enmascara VM</a:t>
+            </a:r>
+          </a:p>
+          <a:p>
+            <a:pPr>
+              <a:spcAft>
+                <a:spcPts val="600"/>
+              </a:spcAft>
+            </a:pPr>
+            <a:r>
+              <a:rPr sz="1500">
+                <a:solidFill>
+                  <a:srgbClr val="22282E"/>
+                </a:solidFill>
+              </a:rPr>
+              <a:t>•  No puedo descifrar el beacon — Cifrado fuerte; extrae la clave del binario/memoria</a:t>
+            </a:r>
+          </a:p>
+          <a:p>
+            <a:pPr>
+              <a:spcAft>
+                <a:spcPts val="600"/>
+              </a:spcAft>
+            </a:pPr>
+            <a:r>
+              <a:rPr sz="1500">
+                <a:solidFill>
+                  <a:srgbClr val="22282E"/>
+                </a:solidFill>
+              </a:rPr>
+              <a:t>•  Beacon irregular — Jitter alto; promedia varios intervalos</a:t>
+            </a:r>
+          </a:p>
+          <a:p>
+            <a:pPr>
+              <a:spcAft>
+                <a:spcPts val="600"/>
+              </a:spcAft>
+            </a:pPr>
+            <a:r>
+              <a:rPr sz="1500">
+                <a:solidFill>
+                  <a:srgbClr val="22282E"/>
+                </a:solidFill>
+              </a:rPr>
+              <a:t>•  Dominios cambian cada ejecución — DGA; identifica y reproduce el algoritmo</a:t>
+            </a:r>
+          </a:p>
+          <a:p>
+            <a:pPr>
+              <a:spcAft>
+                <a:spcPts val="600"/>
+              </a:spcAft>
+            </a:pPr>
+            <a:r>
+              <a:rPr sz="1500">
+                <a:solidFill>
+                  <a:srgbClr val="22282E"/>
+                </a:solidFill>
+              </a:rPr>
+              <a:t>•  Firma con muchos falsos positivos — Basaste en algo genérico; usa URI+UA+patrón combinados</a:t>
+            </a:r>
+          </a:p>
+        </p:txBody>
+      </p:sp>
+    </p:spTree>
+  </p:cSld>
+  <p:clrMapOvr>
+    <a:masterClrMapping/>
+  </p:clrMapOvr>
+</p:sld>
+</file>
+
+<file path=ppt/slides/slide13.xml><?xml version="1.0" encoding="utf-8"?>
+<p:sld xmlns:a="http://schemas.openxmlformats.org/drawingml/2006/main" xmlns:p="http://schemas.openxmlformats.org/presentationml/2006/main" xmlns:r="http://schemas.openxmlformats.org/officeDocument/2006/relationships">
+  <p:cSld>
+    <p:spTree>
+      <p:nvGrpSpPr>
+        <p:cNvPr id="1" name=""/>
+        <p:cNvGrpSpPr/>
+        <p:nvPr/>
+      </p:nvGrpSpPr>
+      <p:grpSpPr/>
+      <p:sp>
+        <p:nvSpPr>
+          <p:cNvPr id="2" name="TextBox 1"/>
+          <p:cNvSpPr txBox="1"/>
+          <p:nvPr/>
+        </p:nvSpPr>
+        <p:spPr>
+          <a:xfrm>
+            <a:off x="457200" y="320040"/>
+            <a:ext cx="8229600" cy="822960"/>
+          </a:xfrm>
+          <a:prstGeom prst="rect">
+            <a:avLst/>
+          </a:prstGeom>
+          <a:noFill/>
+        </p:spPr>
+        <p:txBody>
+          <a:bodyPr wrap="square">
+            <a:spAutoFit/>
+          </a:bodyPr>
+          <a:lstStyle/>
+          <a:p>
+            <a:r>
+              <a:rPr sz="2600" b="1">
+                <a:solidFill>
+                  <a:srgbClr val="0B3D2E"/>
+                </a:solidFill>
+              </a:rPr>
+              <a:t>❓ Preguntas frecuentes</a:t>
+            </a:r>
+          </a:p>
+        </p:txBody>
+      </p:sp>
+      <p:sp>
+        <p:nvSpPr>
+          <p:cNvPr id="3" name="TextBox 2"/>
+          <p:cNvSpPr txBox="1"/>
+          <p:nvPr/>
+        </p:nvSpPr>
+        <p:spPr>
+          <a:xfrm>
+            <a:off x="457200" y="1280160"/>
+            <a:ext cx="8229600" cy="4937760"/>
+          </a:xfrm>
+          <a:prstGeom prst="rect">
+            <a:avLst/>
+          </a:prstGeom>
+          <a:noFill/>
+        </p:spPr>
+        <p:txBody>
+          <a:bodyPr wrap="square">
+            <a:spAutoFit/>
+          </a:bodyPr>
+          <a:lstStyle/>
+          <a:p>
+            <a:pPr>
+              <a:spcAft>
+                <a:spcPts val="600"/>
+              </a:spcAft>
+            </a:pPr>
+            <a:r>
+              <a:rPr sz="1500">
+                <a:solidFill>
+                  <a:srgbClr val="22282E"/>
+                </a:solidFill>
+              </a:rPr>
+              <a:t>•  ❓ ¿Cómo detecto C2 cifrado con HTTPS? Con metadatos: JA3/JA3S, SNI, tamaño y periodicidad de flujos, y reputación del destino, sin necesidad de descifrar.</a:t>
+            </a:r>
+          </a:p>
+          <a:p>
+            <a:pPr>
+              <a:spcAft>
+                <a:spcPts val="600"/>
+              </a:spcAft>
+            </a:pPr>
+            <a:r>
+              <a:rPr sz="1500">
+                <a:solidFill>
+                  <a:srgbClr val="22282E"/>
+                </a:solidFill>
+              </a:rPr>
+              <a:t>•  ❓ ¿Qué es un perfil malleable? Una plantilla (Cobalt Strike) que define cómo luce el tráfico para imitar servicios legítimos y evadir firmas.</a:t>
+            </a:r>
+          </a:p>
+          <a:p>
+            <a:pPr>
+              <a:spcAft>
+                <a:spcPts val="600"/>
+              </a:spcAft>
+            </a:pPr>
+            <a:r>
+              <a:rPr sz="1500">
+                <a:solidFill>
+                  <a:srgbClr val="22282E"/>
+                </a:solidFill>
+              </a:rPr>
+              <a:t>•  ❓ ¿Puedo interactuar con el C2 real? No sin autorización. Analiza con servidor simulado; contactar infraestructura del atacante puede alertarle o ser ilegal.</a:t>
+            </a:r>
+          </a:p>
+        </p:txBody>
+      </p:sp>
+    </p:spTree>
+  </p:cSld>
+  <p:clrMapOvr>
+    <a:masterClrMapping/>
+  </p:clrMapOvr>
+</p:sld>
+</file>
+
+<file path=ppt/slides/slide14.xml><?xml version="1.0" encoding="utf-8"?>
+<p:sld xmlns:a="http://schemas.openxmlformats.org/drawingml/2006/main" xmlns:p="http://schemas.openxmlformats.org/presentationml/2006/main" xmlns:r="http://schemas.openxmlformats.org/officeDocument/2006/relationships">
+  <p:cSld>
+    <p:spTree>
+      <p:nvGrpSpPr>
+        <p:cNvPr id="1" name=""/>
+        <p:cNvGrpSpPr/>
+        <p:nvPr/>
+      </p:nvGrpSpPr>
+      <p:grpSpPr/>
+      <p:sp>
+        <p:nvSpPr>
+          <p:cNvPr id="2" name="TextBox 1"/>
+          <p:cNvSpPr txBox="1"/>
+          <p:nvPr/>
+        </p:nvSpPr>
+        <p:spPr>
+          <a:xfrm>
+            <a:off x="457200" y="320040"/>
+            <a:ext cx="8229600" cy="822960"/>
+          </a:xfrm>
+          <a:prstGeom prst="rect">
+            <a:avLst/>
+          </a:prstGeom>
+          <a:noFill/>
+        </p:spPr>
+        <p:txBody>
+          <a:bodyPr wrap="square">
+            <a:spAutoFit/>
+          </a:bodyPr>
+          <a:lstStyle/>
+          <a:p>
+            <a:r>
+              <a:rPr sz="2600" b="1">
+                <a:solidFill>
+                  <a:srgbClr val="0B3D2E"/>
+                </a:solidFill>
+              </a:rPr>
+              <a:t>🔗 Referencias</a:t>
+            </a:r>
+          </a:p>
+        </p:txBody>
+      </p:sp>
+      <p:sp>
+        <p:nvSpPr>
+          <p:cNvPr id="3" name="TextBox 2"/>
+          <p:cNvSpPr txBox="1"/>
+          <p:nvPr/>
+        </p:nvSpPr>
+        <p:spPr>
+          <a:xfrm>
+            <a:off x="457200" y="1280160"/>
+            <a:ext cx="8229600" cy="4937760"/>
+          </a:xfrm>
+          <a:prstGeom prst="rect">
+            <a:avLst/>
+          </a:prstGeom>
+          <a:noFill/>
+        </p:spPr>
+        <p:txBody>
+          <a:bodyPr wrap="square">
+            <a:spAutoFit/>
+          </a:bodyPr>
+          <a:lstStyle/>
+          <a:p>
+            <a:pPr>
+              <a:spcAft>
+                <a:spcPts val="600"/>
+              </a:spcAft>
+            </a:pPr>
+            <a:r>
+              <a:rPr sz="1500">
+                <a:solidFill>
+                  <a:srgbClr val="22282E"/>
+                </a:solidFill>
+              </a:rPr>
               <a:t>•  Sikorski &amp; Honig, Practical Malware Analysis, cap. 14 (redes malware-céntricas).</a:t>
             </a:r>
           </a:p>
@@ -3554,6 +3825,81 @@
           </a:p>
         </p:txBody>
       </p:sp>
+    </p:spTree>
+  </p:cSld>
+  <p:clrMapOvr>
+    <a:masterClrMapping/>
+  </p:clrMapOvr>
+</p:sld>
+</file>
+
+<file path=ppt/slides/slide15.xml><?xml version="1.0" encoding="utf-8"?>
+<p:sld xmlns:a="http://schemas.openxmlformats.org/drawingml/2006/main" xmlns:p="http://schemas.openxmlformats.org/presentationml/2006/main" xmlns:r="http://schemas.openxmlformats.org/officeDocument/2006/relationships">
+  <p:cSld>
+    <p:spTree>
+      <p:nvGrpSpPr>
+        <p:cNvPr id="1" name=""/>
+        <p:cNvGrpSpPr/>
+        <p:nvPr/>
+      </p:nvGrpSpPr>
+      <p:grpSpPr/>
+      <p:sp>
+        <p:nvSpPr>
+          <p:cNvPr id="2" name="TextBox 1"/>
+          <p:cNvSpPr txBox="1"/>
+          <p:nvPr/>
+        </p:nvSpPr>
+        <p:spPr>
+          <a:xfrm>
+            <a:off x="457200" y="274320"/>
+            <a:ext cx="8229600" cy="640080"/>
+          </a:xfrm>
+          <a:prstGeom prst="rect">
+            <a:avLst/>
+          </a:prstGeom>
+          <a:noFill/>
+        </p:spPr>
+        <p:txBody>
+          <a:bodyPr wrap="square">
+            <a:spAutoFit/>
+          </a:bodyPr>
+          <a:lstStyle/>
+          <a:p>
+            <a:r>
+              <a:rPr sz="2200" b="1">
+                <a:solidFill>
+                  <a:srgbClr val="0B3D2E"/>
+                </a:solidFill>
+              </a:rPr>
+              <a:t>Diagrama de la clase</a:t>
+            </a:r>
+          </a:p>
+        </p:txBody>
+      </p:sp>
+      <p:pic>
+        <p:nvPicPr>
+          <p:cNvPr id="3" name="Picture 2" descr="698df15a097e7508.png"/>
+          <p:cNvPicPr>
+            <a:picLocks noChangeAspect="1"/>
+          </p:cNvPicPr>
+          <p:nvPr/>
+        </p:nvPicPr>
+        <p:blipFill>
+          <a:blip r:embed="rId2"/>
+          <a:stretch>
+            <a:fillRect/>
+          </a:stretch>
+        </p:blipFill>
+        <p:spPr>
+          <a:xfrm>
+            <a:off x="457200" y="1444752"/>
+            <a:ext cx="8229600" cy="4608576"/>
+          </a:xfrm>
+          <a:prstGeom prst="rect">
+            <a:avLst/>
+          </a:prstGeom>
+        </p:spPr>
+      </p:pic>
     </p:spTree>
   </p:cSld>
   <p:clrMapOvr>
@@ -3638,7 +3984,7 @@
                   <a:srgbClr val="22282E"/>
                 </a:solidFill>
               </a:rPr>
-              <a:t>•  Entender y diseccionar el canal de comando y control: cómo el malware localiza su servidor, qué protocolos usa, cómo estructura el beacon y qué cifrado/ofuscación aplica. El alumno aprenderá a capturar, decodificar y describir el C2, extraer configuración e IOCs de red, y reconocer frameworks conocidos (Cobalt Strike, Metasploit) por sus patrones.</a:t>
+              <a:t>•  Entender y diseccionar el canal de comando y control: cómo el malware localiza su servidor, qué protocolos usa, cómo estructura el beacon y qué cifrado/ofuscación aplica. El alumno aprenderá a…</a:t>
             </a:r>
           </a:p>
         </p:txBody>
@@ -4032,7 +4378,7 @@
                   <a:srgbClr val="0B3D2E"/>
                 </a:solidFill>
               </a:rPr>
-              <a:t>📖 Definiciones y características</a:t>
+              <a:t>🧠 Explicación en profundidad</a:t>
             </a:r>
           </a:p>
         </p:txBody>
@@ -4070,67 +4416,97 @@
                   <a:srgbClr val="22282E"/>
                 </a:solidFill>
               </a:rPr>
-              <a:t>•  Beacon: conexión periódica del implante al C2. Característica clave: periodicidad + jitter.</a:t>
-            </a:r>
-          </a:p>
-          <a:p>
-            <a:pPr>
-              <a:spcAft>
-                <a:spcPts val="600"/>
-              </a:spcAft>
-            </a:pPr>
-            <a:r>
-              <a:rPr sz="1500">
-                <a:solidFill>
-                  <a:srgbClr val="22282E"/>
-                </a:solidFill>
-              </a:rPr>
-              <a:t>•  DGA (Domain Generation Algorithm): genera dominios pseudoaleatorios. Característica clave: evita bloqueo por lista.</a:t>
-            </a:r>
-          </a:p>
-          <a:p>
-            <a:pPr>
-              <a:spcAft>
-                <a:spcPts val="600"/>
-              </a:spcAft>
-            </a:pPr>
-            <a:r>
-              <a:rPr sz="1500">
-                <a:solidFill>
-                  <a:srgbClr val="22282E"/>
-                </a:solidFill>
-              </a:rPr>
-              <a:t>•  Dead drop resolver: obtiene el C2 desde un servicio legítimo (redes sociales, pastes). Característica clave: camuflaje.</a:t>
-            </a:r>
-          </a:p>
-          <a:p>
-            <a:pPr>
-              <a:spcAft>
-                <a:spcPts val="600"/>
-              </a:spcAft>
-            </a:pPr>
-            <a:r>
-              <a:rPr sz="1500">
-                <a:solidFill>
-                  <a:srgbClr val="22282E"/>
-                </a:solidFill>
-              </a:rPr>
-              <a:t>•  Malleable C2: perfiles que imitan tráfico legítimo (Cobalt Strike). Característica clave: evasión de firmas.</a:t>
-            </a:r>
-          </a:p>
-          <a:p>
-            <a:pPr>
-              <a:spcAft>
-                <a:spcPts val="600"/>
-              </a:spcAft>
-            </a:pPr>
-            <a:r>
-              <a:rPr sz="1500">
-                <a:solidFill>
-                  <a:srgbClr val="22282E"/>
-                </a:solidFill>
-              </a:rPr>
-              <a:t>•  JA3/JA3S: huella TLS del cliente/servidor. Característica clave: detección aun con HTTPS.</a:t>
+              <a:t>•  Casi todo el malware moderno necesita comunicarse con su operador: recibir órdenes, enviar datos</a:t>
+            </a:r>
+          </a:p>
+          <a:p>
+            <a:pPr>
+              <a:spcAft>
+                <a:spcPts val="600"/>
+              </a:spcAft>
+            </a:pPr>
+            <a:r>
+              <a:rPr sz="1500">
+                <a:solidFill>
+                  <a:srgbClr val="22282E"/>
+                </a:solidFill>
+              </a:rPr>
+              <a:t>•  robados, descargar módulos adicionales. Ese canal es el command and control (C2), y entenderlo es</a:t>
+            </a:r>
+          </a:p>
+          <a:p>
+            <a:pPr>
+              <a:spcAft>
+                <a:spcPts val="600"/>
+              </a:spcAft>
+            </a:pPr>
+            <a:r>
+              <a:rPr sz="1500">
+                <a:solidFill>
+                  <a:srgbClr val="22282E"/>
+                </a:solidFill>
+              </a:rPr>
+              <a:t>•  central por dos razones: es donde el malware revela su infraestructura (dominios, IPs, claves) —los</a:t>
+            </a:r>
+          </a:p>
+          <a:p>
+            <a:pPr>
+              <a:spcAft>
+                <a:spcPts val="600"/>
+              </a:spcAft>
+            </a:pPr>
+            <a:r>
+              <a:rPr sz="1500">
+                <a:solidFill>
+                  <a:srgbClr val="22282E"/>
+                </a:solidFill>
+              </a:rPr>
+              <a:t>•  IOCs más valiosos— y es donde la detección de red (Parte 1 y 8) tiene su mejor oportunidad, porque</a:t>
+            </a:r>
+          </a:p>
+          <a:p>
+            <a:pPr>
+              <a:spcAft>
+                <a:spcPts val="600"/>
+              </a:spcAft>
+            </a:pPr>
+            <a:r>
+              <a:rPr sz="1500">
+                <a:solidFill>
+                  <a:srgbClr val="22282E"/>
+                </a:solidFill>
+              </a:rPr>
+              <a:t>•  el tráfico C2, por muy ofuscado que esté, tiene que salir. Analizar el C2 de una muestra da tanto la</a:t>
+            </a:r>
+          </a:p>
+          <a:p>
+            <a:pPr>
+              <a:spcAft>
+                <a:spcPts val="600"/>
+              </a:spcAft>
+            </a:pPr>
+            <a:r>
+              <a:rPr sz="1500">
+                <a:solidFill>
+                  <a:srgbClr val="22282E"/>
+                </a:solidFill>
+              </a:rPr>
+              <a:t>•  comprensión de cómo se controla como los indicadores para detectarla y bloquearla en toda la red.</a:t>
+            </a:r>
+          </a:p>
+          <a:p>
+            <a:pPr>
+              <a:spcAft>
+                <a:spcPts val="600"/>
+              </a:spcAft>
+            </a:pPr>
+            <a:r>
+              <a:rPr sz="1500">
+                <a:solidFill>
+                  <a:srgbClr val="22282E"/>
+                </a:solidFill>
+              </a:rPr>
+              <a:t>•  El patrón fundamental del C2 es el beacon (baliza): el malware, en lugar de mantener una conexión</a:t>
             </a:r>
           </a:p>
         </p:txBody>
@@ -4181,7 +4557,7 @@
                   <a:srgbClr val="0B3D2E"/>
                 </a:solidFill>
               </a:rPr>
-              <a:t>🧰 Herramientas y preparación</a:t>
+              <a:t>📖 Definiciones y características</a:t>
             </a:r>
           </a:p>
         </p:txBody>
@@ -4219,52 +4595,67 @@
                   <a:srgbClr val="22282E"/>
                 </a:solidFill>
               </a:rPr>
-              <a:t>•  Wireshark + INetSim/FakeNet-NG para capturar y responder.</a:t>
-            </a:r>
-          </a:p>
-          <a:p>
-            <a:pPr>
-              <a:spcAft>
-                <a:spcPts val="600"/>
-              </a:spcAft>
-            </a:pPr>
-            <a:r>
-              <a:rPr sz="1500">
-                <a:solidFill>
-                  <a:srgbClr val="22282E"/>
-                </a:solidFill>
-              </a:rPr>
-              <a:t>•  CyberChef para decodificar (base64, XOR, gunzip).</a:t>
-            </a:r>
-          </a:p>
-          <a:p>
-            <a:pPr>
-              <a:spcAft>
-                <a:spcPts val="600"/>
-              </a:spcAft>
-            </a:pPr>
-            <a:r>
-              <a:rPr sz="1500">
-                <a:solidFill>
-                  <a:srgbClr val="22282E"/>
-                </a:solidFill>
-              </a:rPr>
-              <a:t>•  Suricata/Zeek y firmas de red para detección.</a:t>
-            </a:r>
-          </a:p>
-          <a:p>
-            <a:pPr>
-              <a:spcAft>
-                <a:spcPts val="600"/>
-              </a:spcAft>
-            </a:pPr>
-            <a:r>
-              <a:rPr sz="1500">
-                <a:solidFill>
-                  <a:srgbClr val="22282E"/>
-                </a:solidFill>
-              </a:rPr>
-              <a:t>•  Extractores de config: 1768.py (Cobalt Strike), capa, scripts de comunidad.</a:t>
+              <a:t>•  Beacon: conexión periódica del implante al C2. Característica clave: periodicidad + jitter.</a:t>
+            </a:r>
+          </a:p>
+          <a:p>
+            <a:pPr>
+              <a:spcAft>
+                <a:spcPts val="600"/>
+              </a:spcAft>
+            </a:pPr>
+            <a:r>
+              <a:rPr sz="1500">
+                <a:solidFill>
+                  <a:srgbClr val="22282E"/>
+                </a:solidFill>
+              </a:rPr>
+              <a:t>•  DGA (Domain Generation Algorithm): genera dominios pseudoaleatorios. Característica clave: evita bloqueo por lista.</a:t>
+            </a:r>
+          </a:p>
+          <a:p>
+            <a:pPr>
+              <a:spcAft>
+                <a:spcPts val="600"/>
+              </a:spcAft>
+            </a:pPr>
+            <a:r>
+              <a:rPr sz="1500">
+                <a:solidFill>
+                  <a:srgbClr val="22282E"/>
+                </a:solidFill>
+              </a:rPr>
+              <a:t>•  Dead drop resolver: obtiene el C2 desde un servicio legítimo (redes sociales, pastes). Característica clave: camuflaje.</a:t>
+            </a:r>
+          </a:p>
+          <a:p>
+            <a:pPr>
+              <a:spcAft>
+                <a:spcPts val="600"/>
+              </a:spcAft>
+            </a:pPr>
+            <a:r>
+              <a:rPr sz="1500">
+                <a:solidFill>
+                  <a:srgbClr val="22282E"/>
+                </a:solidFill>
+              </a:rPr>
+              <a:t>•  Malleable C2: perfiles que imitan tráfico legítimo (Cobalt Strike). Característica clave: evasión de firmas.</a:t>
+            </a:r>
+          </a:p>
+          <a:p>
+            <a:pPr>
+              <a:spcAft>
+                <a:spcPts val="600"/>
+              </a:spcAft>
+            </a:pPr>
+            <a:r>
+              <a:rPr sz="1500">
+                <a:solidFill>
+                  <a:srgbClr val="22282E"/>
+                </a:solidFill>
+              </a:rPr>
+              <a:t>•  JA3/JA3S: huella TLS del cliente/servidor. Característica clave: detección aun con HTTPS.</a:t>
             </a:r>
           </a:p>
         </p:txBody>
@@ -4315,7 +4706,7 @@
                   <a:srgbClr val="0B3D2E"/>
                 </a:solidFill>
               </a:rPr>
-              <a:t>🧪 Laboratorio guiado</a:t>
+              <a:t>📔 Glosario</a:t>
             </a:r>
           </a:p>
         </p:txBody>
@@ -4353,97 +4744,97 @@
                   <a:srgbClr val="22282E"/>
                 </a:solidFill>
               </a:rPr>
-              <a:t>•  Restaura base-clean, arranca INetSim/FakeNet y captura con Wireshark en labnet.</a:t>
-            </a:r>
-          </a:p>
-          <a:p>
-            <a:pPr>
-              <a:spcAft>
-                <a:spcPts val="600"/>
-              </a:spcAft>
-            </a:pPr>
-            <a:r>
-              <a:rPr sz="1500">
-                <a:solidFill>
-                  <a:srgbClr val="22282E"/>
-                </a:solidFill>
-              </a:rPr>
-              <a:t>•  Detona la muestra y observa la primera resolución DNS: ¿un dominio fijo o varios pseudoaleatorios (DGA)?</a:t>
-            </a:r>
-          </a:p>
-          <a:p>
-            <a:pPr>
-              <a:spcAft>
-                <a:spcPts val="600"/>
-              </a:spcAft>
-            </a:pPr>
-            <a:r>
-              <a:rPr sz="1500">
-                <a:solidFill>
-                  <a:srgbClr val="22282E"/>
-                </a:solidFill>
-              </a:rPr>
-              <a:t>•  Sigue el flujo HTTP: anota método, URI, headers, user-agent y periodicidad de las peticiones (beacon interval + jitter).</a:t>
-            </a:r>
-          </a:p>
-          <a:p>
-            <a:pPr>
-              <a:spcAft>
-                <a:spcPts val="600"/>
-              </a:spcAft>
-            </a:pPr>
-            <a:r>
-              <a:rPr sz="1500">
-                <a:solidFill>
-                  <a:srgbClr val="22282E"/>
-                </a:solidFill>
-              </a:rPr>
-              <a:t>•  Extrae el cuerpo de las peticiones/respuestas. Pásalo por CyberChef probando base64, XOR de un byte y gunzip para revelar comandos.</a:t>
-            </a:r>
-          </a:p>
-          <a:p>
-            <a:pPr>
-              <a:spcAft>
-                <a:spcPts val="600"/>
-              </a:spcAft>
-            </a:pPr>
-            <a:r>
-              <a:rPr sz="1500">
-                <a:solidFill>
-                  <a:srgbClr val="22282E"/>
-                </a:solidFill>
-              </a:rPr>
-              <a:t>•  Si sospechas Cobalt Strike, usa 1768.py sobre el beacon o la memoria para extraer el perfil (watermark, sleep, URIs, clave pública).</a:t>
-            </a:r>
-          </a:p>
-          <a:p>
-            <a:pPr>
-              <a:spcAft>
-                <a:spcPts val="600"/>
-              </a:spcAft>
-            </a:pPr>
-            <a:r>
-              <a:rPr sz="1500">
-                <a:solidFill>
-                  <a:srgbClr val="22282E"/>
-                </a:solidFill>
-              </a:rPr>
-              <a:t>•  Localiza la configuración de C2 en el binario/memoria (Ghidra/Volatility): dominios, puertos, clave, intervalo.</a:t>
-            </a:r>
-          </a:p>
-          <a:p>
-            <a:pPr>
-              <a:spcAft>
-                <a:spcPts val="600"/>
-              </a:spcAft>
-            </a:pPr>
-            <a:r>
-              <a:rPr sz="1500">
-                <a:solidFill>
-                  <a:srgbClr val="22282E"/>
-                </a:solidFill>
-              </a:rPr>
-              <a:t>•  Calcula el JA3 del handshake TLS (si aplica) y redacta una firma de detección (Suricata) para el patrón observado.</a:t>
+              <a:t>•  Término — Definición concisa</a:t>
+            </a:r>
+          </a:p>
+          <a:p>
+            <a:pPr>
+              <a:spcAft>
+                <a:spcPts val="600"/>
+              </a:spcAft>
+            </a:pPr>
+            <a:r>
+              <a:rPr sz="1500">
+                <a:solidFill>
+                  <a:srgbClr val="22282E"/>
+                </a:solidFill>
+              </a:rPr>
+              <a:t>•  C2 (command and control) — Canal por el que el operador controla el malware</a:t>
+            </a:r>
+          </a:p>
+          <a:p>
+            <a:pPr>
+              <a:spcAft>
+                <a:spcPts val="600"/>
+              </a:spcAft>
+            </a:pPr>
+            <a:r>
+              <a:rPr sz="1500">
+                <a:solidFill>
+                  <a:srgbClr val="22282E"/>
+                </a:solidFill>
+              </a:rPr>
+              <a:t>•  Beacon — Contacto periódico del malware con su C2</a:t>
+            </a:r>
+          </a:p>
+          <a:p>
+            <a:pPr>
+              <a:spcAft>
+                <a:spcPts val="600"/>
+              </a:spcAft>
+            </a:pPr>
+            <a:r>
+              <a:rPr sz="1500">
+                <a:solidFill>
+                  <a:srgbClr val="22282E"/>
+                </a:solidFill>
+              </a:rPr>
+              <a:t>•  Callback — El malware inicia la conexión saliente</a:t>
+            </a:r>
+          </a:p>
+          <a:p>
+            <a:pPr>
+              <a:spcAft>
+                <a:spcPts val="600"/>
+              </a:spcAft>
+            </a:pPr>
+            <a:r>
+              <a:rPr sz="1500">
+                <a:solidFill>
+                  <a:srgbClr val="22282E"/>
+                </a:solidFill>
+              </a:rPr>
+              <a:t>•  Jitter — Variación aleatoria del intervalo del beacon</a:t>
+            </a:r>
+          </a:p>
+          <a:p>
+            <a:pPr>
+              <a:spcAft>
+                <a:spcPts val="600"/>
+              </a:spcAft>
+            </a:pPr>
+            <a:r>
+              <a:rPr sz="1500">
+                <a:solidFill>
+                  <a:srgbClr val="22282E"/>
+                </a:solidFill>
+              </a:rPr>
+              <a:t>•  HTTP/S como C2 — Se mezcla con la navegación; el más común</a:t>
+            </a:r>
+          </a:p>
+          <a:p>
+            <a:pPr>
+              <a:spcAft>
+                <a:spcPts val="600"/>
+              </a:spcAft>
+            </a:pPr>
+            <a:r>
+              <a:rPr sz="1500">
+                <a:solidFill>
+                  <a:srgbClr val="22282E"/>
+                </a:solidFill>
+              </a:rPr>
+              <a:t>•  DNS tunneling — C2 codificado en consultas DNS</a:t>
             </a:r>
           </a:p>
         </p:txBody>
@@ -4494,7 +4885,7 @@
                   <a:srgbClr val="0B3D2E"/>
                 </a:solidFill>
               </a:rPr>
-              <a:t>✍️ Ejercicios</a:t>
+              <a:t>🧰 Herramientas y preparación</a:t>
             </a:r>
           </a:p>
         </p:txBody>
@@ -4532,82 +4923,52 @@
                   <a:srgbClr val="22282E"/>
                 </a:solidFill>
               </a:rPr>
-              <a:t>•  Diferencia beacon HTTP, DNS y TCP crudo por sus ventajas de evasión.</a:t>
-            </a:r>
-          </a:p>
-          <a:p>
-            <a:pPr>
-              <a:spcAft>
-                <a:spcPts val="600"/>
-              </a:spcAft>
-            </a:pPr>
-            <a:r>
-              <a:rPr sz="1500">
-                <a:solidFill>
-                  <a:srgbClr val="22282E"/>
-                </a:solidFill>
-              </a:rPr>
-              <a:t>•  Explica cómo un DGA complica el bloqueo y cómo se puede predecir.</a:t>
-            </a:r>
-          </a:p>
-          <a:p>
-            <a:pPr>
-              <a:spcAft>
-                <a:spcPts val="600"/>
-              </a:spcAft>
-            </a:pPr>
-            <a:r>
-              <a:rPr sz="1500">
-                <a:solidFill>
-                  <a:srgbClr val="22282E"/>
-                </a:solidFill>
-              </a:rPr>
-              <a:t>•  Decodifica un payload C2 simple con CyberChef y describe el comando.</a:t>
-            </a:r>
-          </a:p>
-          <a:p>
-            <a:pPr>
-              <a:spcAft>
-                <a:spcPts val="600"/>
-              </a:spcAft>
-            </a:pPr>
-            <a:r>
-              <a:rPr sz="1500">
-                <a:solidFill>
-                  <a:srgbClr val="22282E"/>
-                </a:solidFill>
-              </a:rPr>
-              <a:t>•  Reconoce un perfil malleable y qué imita.</a:t>
-            </a:r>
-          </a:p>
-          <a:p>
-            <a:pPr>
-              <a:spcAft>
-                <a:spcPts val="600"/>
-              </a:spcAft>
-            </a:pPr>
-            <a:r>
-              <a:rPr sz="1500">
-                <a:solidFill>
-                  <a:srgbClr val="22282E"/>
-                </a:solidFill>
-              </a:rPr>
-              <a:t>•  Escribe una firma Suricata para un user-agent o URI característico.</a:t>
-            </a:r>
-          </a:p>
-          <a:p>
-            <a:pPr>
-              <a:spcAft>
-                <a:spcPts val="600"/>
-              </a:spcAft>
-            </a:pPr>
-            <a:r>
-              <a:rPr sz="1500">
-                <a:solidFill>
-                  <a:srgbClr val="22282E"/>
-                </a:solidFill>
-              </a:rPr>
-              <a:t>•  Extrae la config de C2 de una muestra y preséntala en tabla.</a:t>
+              <a:t>•  Wireshark + INetSim/FakeNet-NG para capturar y responder.</a:t>
+            </a:r>
+          </a:p>
+          <a:p>
+            <a:pPr>
+              <a:spcAft>
+                <a:spcPts val="600"/>
+              </a:spcAft>
+            </a:pPr>
+            <a:r>
+              <a:rPr sz="1500">
+                <a:solidFill>
+                  <a:srgbClr val="22282E"/>
+                </a:solidFill>
+              </a:rPr>
+              <a:t>•  CyberChef para decodificar (base64, XOR, gunzip).</a:t>
+            </a:r>
+          </a:p>
+          <a:p>
+            <a:pPr>
+              <a:spcAft>
+                <a:spcPts val="600"/>
+              </a:spcAft>
+            </a:pPr>
+            <a:r>
+              <a:rPr sz="1500">
+                <a:solidFill>
+                  <a:srgbClr val="22282E"/>
+                </a:solidFill>
+              </a:rPr>
+              <a:t>•  Suricata/Zeek y firmas de red para detección.</a:t>
+            </a:r>
+          </a:p>
+          <a:p>
+            <a:pPr>
+              <a:spcAft>
+                <a:spcPts val="600"/>
+              </a:spcAft>
+            </a:pPr>
+            <a:r>
+              <a:rPr sz="1500">
+                <a:solidFill>
+                  <a:srgbClr val="22282E"/>
+                </a:solidFill>
+              </a:rPr>
+              <a:t>•  Extractores de config: 1768.py (Cobalt Strike), capa, scripts de comunidad.</a:t>
             </a:r>
           </a:p>
         </p:txBody>
@@ -4658,7 +5019,7 @@
                   <a:srgbClr val="0B3D2E"/>
                 </a:solidFill>
               </a:rPr>
-              <a:t>📝 Reto verificable</a:t>
+              <a:t>🧪 Laboratorio guiado</a:t>
             </a:r>
           </a:p>
         </p:txBody>
@@ -4696,22 +5057,97 @@
                   <a:srgbClr val="22282E"/>
                 </a:solidFill>
               </a:rPr>
-              <a:t>•  Entrega un informe de C2 de una muestra con: mecanismo de resolución, protocolo y patrón de beacon, config extraída (dominios/puertos/clave/intervalo), muestra de tráfico decodificado y una firma de detección de red.</a:t>
-            </a:r>
-          </a:p>
-          <a:p>
-            <a:pPr>
-              <a:spcAft>
-                <a:spcPts val="600"/>
-              </a:spcAft>
-            </a:pPr>
-            <a:r>
-              <a:rPr sz="1500">
-                <a:solidFill>
-                  <a:srgbClr val="22282E"/>
-                </a:solidFill>
-              </a:rPr>
-              <a:t>•  Criterio de aceptación: la firma propuesta dispara sobre el tráfico capturado en el lab y la config incluye al menos un dominio/IP y el intervalo de beacon verificados.</a:t>
+              <a:t>•  Restaura base-clean, arranca INetSim/FakeNet y captura con Wireshark en labnet.</a:t>
+            </a:r>
+          </a:p>
+          <a:p>
+            <a:pPr>
+              <a:spcAft>
+                <a:spcPts val="600"/>
+              </a:spcAft>
+            </a:pPr>
+            <a:r>
+              <a:rPr sz="1500">
+                <a:solidFill>
+                  <a:srgbClr val="22282E"/>
+                </a:solidFill>
+              </a:rPr>
+              <a:t>•  Detona la muestra y observa la primera resolución DNS: ¿un dominio fijo o varios pseudoaleatorios (DGA)?</a:t>
+            </a:r>
+          </a:p>
+          <a:p>
+            <a:pPr>
+              <a:spcAft>
+                <a:spcPts val="600"/>
+              </a:spcAft>
+            </a:pPr>
+            <a:r>
+              <a:rPr sz="1500">
+                <a:solidFill>
+                  <a:srgbClr val="22282E"/>
+                </a:solidFill>
+              </a:rPr>
+              <a:t>•  Sigue el flujo HTTP: anota método, URI, headers, user-agent y periodicidad de las peticiones (beacon interval + jitter).</a:t>
+            </a:r>
+          </a:p>
+          <a:p>
+            <a:pPr>
+              <a:spcAft>
+                <a:spcPts val="600"/>
+              </a:spcAft>
+            </a:pPr>
+            <a:r>
+              <a:rPr sz="1500">
+                <a:solidFill>
+                  <a:srgbClr val="22282E"/>
+                </a:solidFill>
+              </a:rPr>
+              <a:t>•  Extrae el cuerpo de las peticiones/respuestas. Pásalo por CyberChef probando base64, XOR de un byte y gunzip para revelar comandos.</a:t>
+            </a:r>
+          </a:p>
+          <a:p>
+            <a:pPr>
+              <a:spcAft>
+                <a:spcPts val="600"/>
+              </a:spcAft>
+            </a:pPr>
+            <a:r>
+              <a:rPr sz="1500">
+                <a:solidFill>
+                  <a:srgbClr val="22282E"/>
+                </a:solidFill>
+              </a:rPr>
+              <a:t>•  Si sospechas Cobalt Strike, usa 1768.py sobre el beacon o la memoria para extraer el perfil (watermark, sleep, URIs, clave pública).</a:t>
+            </a:r>
+          </a:p>
+          <a:p>
+            <a:pPr>
+              <a:spcAft>
+                <a:spcPts val="600"/>
+              </a:spcAft>
+            </a:pPr>
+            <a:r>
+              <a:rPr sz="1500">
+                <a:solidFill>
+                  <a:srgbClr val="22282E"/>
+                </a:solidFill>
+              </a:rPr>
+              <a:t>•  Localiza la configuración de C2 en el binario/memoria (Ghidra/Volatility): dominios, puertos, clave, intervalo.</a:t>
+            </a:r>
+          </a:p>
+          <a:p>
+            <a:pPr>
+              <a:spcAft>
+                <a:spcPts val="600"/>
+              </a:spcAft>
+            </a:pPr>
+            <a:r>
+              <a:rPr sz="1500">
+                <a:solidFill>
+                  <a:srgbClr val="22282E"/>
+                </a:solidFill>
+              </a:rPr>
+              <a:t>•  Calcula el JA3 del handshake TLS (si aplica) y redacta una firma de detección (Suricata) para el patrón observado.</a:t>
             </a:r>
           </a:p>
         </p:txBody>
